--- a/crates/pptx-parse/tests/fixtures/slide-number-fields.pptx
+++ b/crates/pptx-parse/tests/fixtures/slide-number-fields.pptx
@@ -2527,7 +2527,7 @@
                 </a:solidFill>
                 <a:latin typeface="Arial"/>
               </a:rPr>
-              <a:t>11</a:t>
+              <a:t>77</a:t>
             </a:fld>
           </a:p>
         </p:txBody>
